--- a/catalog/samples/nested_row_matrix.pptx
+++ b/catalog/samples/nested_row_matrix.pptx
@@ -1422,7 +1422,7 @@
           </a:p>
           <a:p>
             <a:r>
-              <a:t>  "template_sha256": "b4804401c7046a69611ceae63cb768862514b0c7906f966ac7c0f43a3c137787"</a:t>
+              <a:t>  "template_sha256": "44dd0af430d3277c5e16f47569298cb202c90126843812ce470df6bccf5e17e0"</a:t>
             </a:r>
           </a:p>
           <a:p>
